--- a/curso/pptx/S86.pptx
+++ b/curso/pptx/S86.pptx
@@ -5256,7 +5256,7 @@
                 </a:solidFill>
                 <a:latin typeface="Nunito Sans"/>
               </a:rPr>
-              <a:t>¿Cómo lo sabes?</a:t>
+              <a:t>你怎么知道的？</a:t>
             </a:r>
             <a:r>
               <a:rPr sz="2800" b="0">
@@ -5265,7 +5265,7 @@
                 </a:solidFill>
                 <a:latin typeface="Nunito Sans"/>
               </a:rPr>
-              <a:t> ¿Lo has comprobado o lo has oído?</a:t>
+              <a:t>是你核实过的，还是听来的？</a:t>
             </a:r>
           </a:p>
           <a:p>
@@ -5290,7 +5290,7 @@
                 </a:solidFill>
                 <a:latin typeface="Nunito Sans"/>
               </a:rPr>
-              <a:t>¿Cuántos casos has mirado?</a:t>
+              <a:t>你看了多少个例子？</a:t>
             </a:r>
             <a:r>
               <a:rPr sz="2800" b="0">
@@ -5299,7 +5299,7 @@
                 </a:solidFill>
                 <a:latin typeface="Nunito Sans"/>
               </a:rPr>
-              <a:t> Uno no basta （第19课）.</a:t>
+              <a:t>一个是不够的（第19课）。</a:t>
             </a:r>
           </a:p>
           <a:p>
@@ -5324,7 +5324,7 @@
                 </a:solidFill>
                 <a:latin typeface="Nunito Sans"/>
               </a:rPr>
-              <a:t>¿Busco solo lo que me da la razón?</a:t>
+              <a:t>我是不是只找能证明我对的东西？</a:t>
             </a:r>
             <a:r>
               <a:rPr sz="2800" b="0">
@@ -5333,7 +5333,7 @@
                 </a:solidFill>
                 <a:latin typeface="Nunito Sans"/>
               </a:rPr>
-              <a:t> （第44课）.</a:t>
+              <a:t>（第44课）。</a:t>
             </a:r>
           </a:p>
           <a:p>
@@ -5358,7 +5358,7 @@
                 </a:solidFill>
                 <a:latin typeface="Nunito Sans"/>
               </a:rPr>
-              <a:t>¿Veo a la persona o solo su grupo?</a:t>
+              <a:t>我看到的是这个人，还是只看到他的群体？</a:t>
             </a:r>
           </a:p>
         </p:txBody>
@@ -7152,7 +7152,7 @@
                 </a:solidFill>
                 <a:latin typeface="Nunito Sans"/>
               </a:rPr>
-              <a:t>Pre-juicio: un juicio </a:t>
+              <a:t>偏见（pre-juicio）：在了解</a:t>
             </a:r>
             <a:r>
               <a:rPr sz="2800" b="1">
@@ -7161,7 +7161,7 @@
                 </a:solidFill>
                 <a:latin typeface="Nunito Sans"/>
               </a:rPr>
-              <a:t>antes</a:t>
+              <a:t>之前</a:t>
             </a:r>
             <a:r>
               <a:rPr sz="2800" b="0">
@@ -7170,7 +7170,7 @@
                 </a:solidFill>
                 <a:latin typeface="Nunito Sans"/>
               </a:rPr>
-              <a:t> de conocer</a:t>
+              <a:t>就下的判断</a:t>
             </a:r>
           </a:p>
           <a:p>
@@ -7195,7 +7195,7 @@
                 </a:solidFill>
                 <a:latin typeface="Nunito Sans"/>
               </a:rPr>
-              <a:t>Suele ser negativo y cuesta mucho cambiarlo</a:t>
+              <a:t>通常是负面的，而且很难改变</a:t>
             </a:r>
           </a:p>
           <a:p>
@@ -7220,7 +7220,7 @@
                 </a:solidFill>
                 <a:latin typeface="Nunito Sans"/>
               </a:rPr>
-              <a:t>Se aprende: nadie nace con prejuicios</a:t>
+              <a:t>它是学来的：没有人生来就有偏见</a:t>
             </a:r>
           </a:p>
         </p:txBody>
@@ -7866,7 +7866,7 @@
                 </a:solidFill>
                 <a:latin typeface="Nunito Sans"/>
               </a:rPr>
-              <a:t>Palabra creada por la filósofa </a:t>
+              <a:t>这个词是哲学家</a:t>
             </a:r>
             <a:r>
               <a:rPr sz="2800" b="1">
@@ -7875,7 +7875,16 @@
                 </a:solidFill>
                 <a:latin typeface="Nunito Sans"/>
               </a:rPr>
-              <a:t>Adela Cortina</a:t>
+              <a:t>阿德拉·科尔蒂纳（Adela Cortina）</a:t>
+            </a:r>
+            <a:r>
+              <a:rPr sz="2800" b="0">
+                <a:solidFill>
+                  <a:srgbClr val="1F2A44"/>
+                </a:solidFill>
+                <a:latin typeface="Nunito Sans"/>
+              </a:rPr>
+              <a:t>创造的</a:t>
             </a:r>
           </a:p>
           <a:p>
@@ -7900,7 +7909,7 @@
                 </a:solidFill>
                 <a:latin typeface="Nunito Sans"/>
               </a:rPr>
-              <a:t>La RAE la aceptó en el diccionario en </a:t>
+              <a:t>西班牙皇家语言学院（RAE）在</a:t>
             </a:r>
             <a:r>
               <a:rPr sz="2800" b="1">
@@ -7909,7 +7918,16 @@
                 </a:solidFill>
                 <a:latin typeface="Nunito Sans"/>
               </a:rPr>
-              <a:t>2017</a:t>
+              <a:t>2017年</a:t>
+            </a:r>
+            <a:r>
+              <a:rPr sz="2800" b="0">
+                <a:solidFill>
+                  <a:srgbClr val="1F2A44"/>
+                </a:solidFill>
+                <a:latin typeface="Nunito Sans"/>
+              </a:rPr>
+              <a:t>把它收入了词典</a:t>
             </a:r>
           </a:p>
           <a:p>
@@ -7934,7 +7952,7 @@
                 </a:solidFill>
                 <a:latin typeface="Nunito Sans"/>
               </a:rPr>
-              <a:t>Su idea: a menudo no molesta el de fuera, sino el </a:t>
+              <a:t>她的想法是：常常让人不舒服的并不是外来的人，而是</a:t>
             </a:r>
             <a:r>
               <a:rPr sz="2800" b="1">
@@ -7943,7 +7961,7 @@
                 </a:solidFill>
                 <a:latin typeface="Nunito Sans"/>
               </a:rPr>
-              <a:t>pobre</a:t>
+              <a:t>穷人</a:t>
             </a:r>
           </a:p>
         </p:txBody>

--- a/curso/pptx/S86.pptx
+++ b/curso/pptx/S86.pptx
@@ -4543,7 +4543,7 @@
                 </a:solidFill>
                 <a:latin typeface="Nunito Sans"/>
               </a:rPr>
-              <a:t>Omar 认为一个虚构街区的人都爱惹事。如果其中一个人做错了事，他会记上好几个月。那一百个没做错任何事的人，他看都看不到。</a:t>
+              <a:t>一个男孩认为一个虚构街区的人都爱惹事。如果其中一个人做错了事，他会记上好几个月。那一百个没做错任何事的人，他看都看不到。</a:t>
             </a:r>
           </a:p>
         </p:txBody>
@@ -4591,7 +4591,7 @@
                 </a:solidFill>
                 <a:latin typeface="Nunito Sans"/>
               </a:rPr>
-              <a:t>Omar 只盯着能证实自己想法的东西：确认偏见（第44课）。</a:t>
+              <a:t>这个男孩只盯着能证实自己想法的东西：确认偏见（第44课）。</a:t>
             </a:r>
           </a:p>
           <a:p>
@@ -4852,7 +4852,7 @@
                 </a:solidFill>
                 <a:latin typeface="Nunito Sans"/>
               </a:rPr>
-              <a:t>在更衣室里，Kevin 每次遇到不喜欢的东西就说一句“这是同性恋的东西”。别人提醒他时，他回答：“只是个玩笑。我对谁都没有意见。”</a:t>
+              <a:t>在更衣室里，一个男孩每次遇到不喜欢的东西就说一句“这是同性恋的东西”。别人提醒他时，他回答：“只是个玩笑。我对谁都没有意见。”</a:t>
             </a:r>
           </a:p>
         </p:txBody>
@@ -4900,7 +4900,7 @@
                 </a:solidFill>
                 <a:latin typeface="Nunito Sans"/>
               </a:rPr>
-              <a:t>Kevin 并不想伤害人。那就没事了吗？</a:t>
+              <a:t>这个男孩并不想伤害人。那就没事了吗？</a:t>
             </a:r>
           </a:p>
           <a:p>
@@ -4925,7 +4925,7 @@
                 </a:solidFill>
                 <a:latin typeface="Nunito Sans"/>
               </a:rPr>
-              <a:t>看起来不是：Kevin 并不恨任何人，而且是笑着说的。</a:t>
+              <a:t>看起来不是：这个男孩并不恨任何人，而且是笑着说的。</a:t>
             </a:r>
           </a:p>
           <a:p>
